--- a/ゲーム科1年/00_前期/プログラミングⅡ/16_動的メモリ管理.pptx
+++ b/ゲーム科1年/00_前期/プログラミングⅡ/16_動的メモリ管理.pptx
@@ -5906,10 +5906,10 @@
       </p:sp>
       <p:pic>
         <p:nvPicPr>
-          <p:cNvPr id="3" name="図 2">
-            <a:extLst>
-              <a:ext uri="{FF2B5EF4-FFF2-40B4-BE49-F238E27FC236}">
-                <a16:creationId xmlns:a16="http://schemas.microsoft.com/office/drawing/2014/main" id="{D2F07889-5FD1-4136-99AB-09EEEBB091BD}"/>
+          <p:cNvPr id="5" name="図 4">
+            <a:extLst>
+              <a:ext uri="{FF2B5EF4-FFF2-40B4-BE49-F238E27FC236}">
+                <a16:creationId xmlns:a16="http://schemas.microsoft.com/office/drawing/2014/main" id="{D8663E5C-182D-4FB4-A98A-C7D49411FB8B}"/>
               </a:ext>
             </a:extLst>
           </p:cNvPr>
@@ -5926,8 +5926,8 @@
         </p:blipFill>
         <p:spPr>
           <a:xfrm>
-            <a:off x="567543" y="1763258"/>
-            <a:ext cx="5333198" cy="4485142"/>
+            <a:off x="567542" y="1763258"/>
+            <a:ext cx="5352190" cy="4823809"/>
           </a:xfrm>
           <a:prstGeom prst="rect">
             <a:avLst/>

--- a/ゲーム科1年/00_前期/プログラミングⅡ/16_動的メモリ管理.pptx
+++ b/ゲーム科1年/00_前期/プログラミングⅡ/16_動的メモリ管理.pptx
@@ -273,7 +273,7 @@
           <a:p>
             <a:fld id="{E9CC885B-4903-4D54-9A93-00025F12DED9}" type="datetimeFigureOut">
               <a:rPr kumimoji="1" lang="ja-JP" altLang="en-US" smtClean="0"/>
-              <a:t>2026/3/3</a:t>
+              <a:t>2026/5/13</a:t>
             </a:fld>
             <a:endParaRPr kumimoji="1" lang="ja-JP" altLang="en-US"/>
           </a:p>
@@ -503,7 +503,7 @@
           <a:p>
             <a:fld id="{E9CC885B-4903-4D54-9A93-00025F12DED9}" type="datetimeFigureOut">
               <a:rPr kumimoji="1" lang="ja-JP" altLang="en-US" smtClean="0"/>
-              <a:t>2026/3/3</a:t>
+              <a:t>2026/5/13</a:t>
             </a:fld>
             <a:endParaRPr kumimoji="1" lang="ja-JP" altLang="en-US"/>
           </a:p>
@@ -743,7 +743,7 @@
           <a:p>
             <a:fld id="{E9CC885B-4903-4D54-9A93-00025F12DED9}" type="datetimeFigureOut">
               <a:rPr kumimoji="1" lang="ja-JP" altLang="en-US" smtClean="0"/>
-              <a:t>2026/3/3</a:t>
+              <a:t>2026/5/13</a:t>
             </a:fld>
             <a:endParaRPr kumimoji="1" lang="ja-JP" altLang="en-US"/>
           </a:p>
@@ -973,7 +973,7 @@
           <a:p>
             <a:fld id="{E9CC885B-4903-4D54-9A93-00025F12DED9}" type="datetimeFigureOut">
               <a:rPr kumimoji="1" lang="ja-JP" altLang="en-US" smtClean="0"/>
-              <a:t>2026/3/3</a:t>
+              <a:t>2026/5/13</a:t>
             </a:fld>
             <a:endParaRPr kumimoji="1" lang="ja-JP" altLang="en-US"/>
           </a:p>
@@ -1248,7 +1248,7 @@
           <a:p>
             <a:fld id="{E9CC885B-4903-4D54-9A93-00025F12DED9}" type="datetimeFigureOut">
               <a:rPr kumimoji="1" lang="ja-JP" altLang="en-US" smtClean="0"/>
-              <a:t>2026/3/3</a:t>
+              <a:t>2026/5/13</a:t>
             </a:fld>
             <a:endParaRPr kumimoji="1" lang="ja-JP" altLang="en-US"/>
           </a:p>
@@ -1577,7 +1577,7 @@
           <a:p>
             <a:fld id="{E9CC885B-4903-4D54-9A93-00025F12DED9}" type="datetimeFigureOut">
               <a:rPr kumimoji="1" lang="ja-JP" altLang="en-US" smtClean="0"/>
-              <a:t>2026/3/3</a:t>
+              <a:t>2026/5/13</a:t>
             </a:fld>
             <a:endParaRPr kumimoji="1" lang="ja-JP" altLang="en-US"/>
           </a:p>
@@ -2053,7 +2053,7 @@
           <a:p>
             <a:fld id="{E9CC885B-4903-4D54-9A93-00025F12DED9}" type="datetimeFigureOut">
               <a:rPr kumimoji="1" lang="ja-JP" altLang="en-US" smtClean="0"/>
-              <a:t>2026/3/3</a:t>
+              <a:t>2026/5/13</a:t>
             </a:fld>
             <a:endParaRPr kumimoji="1" lang="ja-JP" altLang="en-US"/>
           </a:p>
@@ -2194,7 +2194,7 @@
           <a:p>
             <a:fld id="{E9CC885B-4903-4D54-9A93-00025F12DED9}" type="datetimeFigureOut">
               <a:rPr kumimoji="1" lang="ja-JP" altLang="en-US" smtClean="0"/>
-              <a:t>2026/3/3</a:t>
+              <a:t>2026/5/13</a:t>
             </a:fld>
             <a:endParaRPr kumimoji="1" lang="ja-JP" altLang="en-US"/>
           </a:p>
@@ -2307,7 +2307,7 @@
           <a:p>
             <a:fld id="{E9CC885B-4903-4D54-9A93-00025F12DED9}" type="datetimeFigureOut">
               <a:rPr kumimoji="1" lang="ja-JP" altLang="en-US" smtClean="0"/>
-              <a:t>2026/3/3</a:t>
+              <a:t>2026/5/13</a:t>
             </a:fld>
             <a:endParaRPr kumimoji="1" lang="ja-JP" altLang="en-US"/>
           </a:p>
@@ -2650,7 +2650,7 @@
           <a:p>
             <a:fld id="{E9CC885B-4903-4D54-9A93-00025F12DED9}" type="datetimeFigureOut">
               <a:rPr kumimoji="1" lang="ja-JP" altLang="en-US" smtClean="0"/>
-              <a:t>2026/3/3</a:t>
+              <a:t>2026/5/13</a:t>
             </a:fld>
             <a:endParaRPr kumimoji="1" lang="ja-JP" altLang="en-US"/>
           </a:p>
@@ -2938,7 +2938,7 @@
           <a:p>
             <a:fld id="{E9CC885B-4903-4D54-9A93-00025F12DED9}" type="datetimeFigureOut">
               <a:rPr kumimoji="1" lang="ja-JP" altLang="en-US" smtClean="0"/>
-              <a:t>2026/3/3</a:t>
+              <a:t>2026/5/13</a:t>
             </a:fld>
             <a:endParaRPr kumimoji="1" lang="ja-JP" altLang="en-US"/>
           </a:p>
@@ -3211,7 +3211,7 @@
           <a:p>
             <a:fld id="{E9CC885B-4903-4D54-9A93-00025F12DED9}" type="datetimeFigureOut">
               <a:rPr kumimoji="1" lang="ja-JP" altLang="en-US" smtClean="0"/>
-              <a:t>2026/3/3</a:t>
+              <a:t>2026/5/13</a:t>
             </a:fld>
             <a:endParaRPr kumimoji="1" lang="ja-JP" altLang="en-US"/>
           </a:p>
@@ -3730,21 +3730,42 @@
           </a:p>
           <a:p>
             <a:r>
-              <a:rPr lang="en-US" altLang="ja-JP" sz="2400" dirty="0"/>
-              <a:t>#define </a:t>
-            </a:r>
-            <a:r>
               <a:rPr lang="en-US" altLang="ja-JP" sz="2400" b="1" dirty="0">
                 <a:solidFill>
-                  <a:srgbClr val="7030A0"/>
+                  <a:srgbClr val="00B050"/>
                 </a:solidFill>
               </a:rPr>
-              <a:t>ENEMY_MAX</a:t>
-            </a:r>
-            <a:r>
-              <a:rPr lang="en-US" altLang="ja-JP" sz="2400" dirty="0"/>
-              <a:t> 30</a:t>
-            </a:r>
+              <a:t>// </a:t>
+            </a:r>
+            <a:r>
+              <a:rPr lang="ja-JP" altLang="en-US" sz="2400" b="1" dirty="0">
+                <a:solidFill>
+                  <a:srgbClr val="00B050"/>
+                </a:solidFill>
+              </a:rPr>
+              <a:t>敵</a:t>
+            </a:r>
+            <a:r>
+              <a:rPr lang="en-US" altLang="ja-JP" sz="2400" b="1" dirty="0">
+                <a:solidFill>
+                  <a:srgbClr val="00B050"/>
+                </a:solidFill>
+              </a:rPr>
+              <a:t>30</a:t>
+            </a:r>
+            <a:r>
+              <a:rPr lang="ja-JP" altLang="en-US" sz="2400" b="1" dirty="0">
+                <a:solidFill>
+                  <a:srgbClr val="00B050"/>
+                </a:solidFill>
+              </a:rPr>
+              <a:t>体分の配列</a:t>
+            </a:r>
+            <a:endParaRPr lang="en-US" altLang="ja-JP" sz="2400" b="1" dirty="0">
+              <a:solidFill>
+                <a:srgbClr val="00B050"/>
+              </a:solidFill>
+            </a:endParaRPr>
           </a:p>
           <a:p>
             <a:r>
@@ -3773,7 +3794,7 @@
                   <a:srgbClr val="7030A0"/>
                 </a:solidFill>
               </a:rPr>
-              <a:t>ENEMY_MAX</a:t>
+              <a:t>30</a:t>
             </a:r>
             <a:r>
               <a:rPr lang="en-US" altLang="ja-JP" sz="2400" dirty="0"/>
@@ -5452,7 +5473,7 @@
         <p:spPr>
           <a:xfrm>
             <a:off x="567542" y="1189161"/>
-            <a:ext cx="9639177" cy="3046988"/>
+            <a:ext cx="9639177" cy="2677656"/>
           </a:xfrm>
           <a:prstGeom prst="rect">
             <a:avLst/>
@@ -5464,24 +5485,6 @@
             <a:spAutoFit/>
           </a:bodyPr>
           <a:lstStyle/>
-          <a:p>
-            <a:r>
-              <a:rPr lang="en-US" altLang="ja-JP" sz="2400" dirty="0"/>
-              <a:t>#define </a:t>
-            </a:r>
-            <a:r>
-              <a:rPr lang="en-US" altLang="ja-JP" sz="2400" b="1" dirty="0">
-                <a:solidFill>
-                  <a:srgbClr val="7030A0"/>
-                </a:solidFill>
-              </a:rPr>
-              <a:t>ENEMY_MAX</a:t>
-            </a:r>
-            <a:r>
-              <a:rPr lang="en-US" altLang="ja-JP" sz="2400" dirty="0"/>
-              <a:t> 30</a:t>
-            </a:r>
-          </a:p>
           <a:p>
             <a:r>
               <a:rPr lang="en-US" altLang="ja-JP" sz="2400" b="1" dirty="0" err="1">
@@ -5509,7 +5512,7 @@
                   <a:srgbClr val="7030A0"/>
                 </a:solidFill>
               </a:rPr>
-              <a:t>ENEMY_MAX</a:t>
+              <a:t>30</a:t>
             </a:r>
             <a:r>
               <a:rPr lang="en-US" altLang="ja-JP" sz="2400" dirty="0"/>
